--- a/slikovna_gradiva/qrisp_sola.pptx
+++ b/slikovna_gradiva/qrisp_sola.pptx
@@ -124,6 +124,35 @@
 </p:presentation>
 </file>
 
+<file path=ppt/changesInfos/changesInfo1.xml><?xml version="1.0" encoding="utf-8"?>
+<pc:chgInfo xmlns:a="http://schemas.openxmlformats.org/drawingml/2006/main" xmlns:r="http://schemas.openxmlformats.org/officeDocument/2006/relationships" xmlns:ac="http://schemas.microsoft.com/office/drawing/2013/main/command" xmlns:pc="http://schemas.microsoft.com/office/powerpoint/2013/main/command">
+  <pc:docChgLst>
+    <pc:chgData name="Pretnar, Matija" userId="6c99adb3-0a8e-4bfb-b315-ebe63621e73d" providerId="ADAL" clId="{2E5647A1-3B31-5755-8C1B-1D4ADA677DCE}"/>
+    <pc:docChg chg="modSld">
+      <pc:chgData name="Pretnar, Matija" userId="6c99adb3-0a8e-4bfb-b315-ebe63621e73d" providerId="ADAL" clId="{2E5647A1-3B31-5755-8C1B-1D4ADA677DCE}" dt="2026-06-26T09:29:43.243" v="5" actId="20577"/>
+      <pc:docMkLst>
+        <pc:docMk/>
+      </pc:docMkLst>
+      <pc:sldChg chg="modSp mod">
+        <pc:chgData name="Pretnar, Matija" userId="6c99adb3-0a8e-4bfb-b315-ebe63621e73d" providerId="ADAL" clId="{2E5647A1-3B31-5755-8C1B-1D4ADA677DCE}" dt="2026-06-26T09:29:43.243" v="5" actId="20577"/>
+        <pc:sldMkLst>
+          <pc:docMk/>
+          <pc:sldMk cId="1249721231" sldId="267"/>
+        </pc:sldMkLst>
+        <pc:spChg chg="mod">
+          <ac:chgData name="Pretnar, Matija" userId="6c99adb3-0a8e-4bfb-b315-ebe63621e73d" providerId="ADAL" clId="{2E5647A1-3B31-5755-8C1B-1D4ADA677DCE}" dt="2026-06-26T09:29:43.243" v="5" actId="20577"/>
+          <ac:spMkLst>
+            <pc:docMk/>
+            <pc:sldMk cId="1249721231" sldId="267"/>
+            <ac:spMk id="2" creationId="{A00BBF16-3038-4DCB-8E3E-480E3E18F350}"/>
+          </ac:spMkLst>
+        </pc:spChg>
+      </pc:sldChg>
+    </pc:docChg>
+  </pc:docChgLst>
+</pc:chgInfo>
+</file>
+
 <file path=ppt/slideLayouts/slideLayout1.xml><?xml version="1.0" encoding="utf-8"?>
 <p:sldLayout xmlns:a="http://schemas.openxmlformats.org/drawingml/2006/main" xmlns:r="http://schemas.openxmlformats.org/officeDocument/2006/relationships" xmlns:p="http://schemas.openxmlformats.org/presentationml/2006/main" type="title" preserve="1">
   <p:cSld name="Title Slide">
@@ -271,7 +300,7 @@
           <a:p>
             <a:fld id="{A2AEAC0E-F99C-47C9-A4ED-4F9191E5C1C0}" type="datetimeFigureOut">
               <a:rPr lang="en-US" smtClean="0"/>
-              <a:t>7/2/2025</a:t>
+              <a:t>6/26/26</a:t>
             </a:fld>
             <a:endParaRPr lang="en-US"/>
           </a:p>
@@ -469,7 +498,7 @@
           <a:p>
             <a:fld id="{A2AEAC0E-F99C-47C9-A4ED-4F9191E5C1C0}" type="datetimeFigureOut">
               <a:rPr lang="en-US" smtClean="0"/>
-              <a:t>7/2/2025</a:t>
+              <a:t>6/26/26</a:t>
             </a:fld>
             <a:endParaRPr lang="en-US"/>
           </a:p>
@@ -677,7 +706,7 @@
           <a:p>
             <a:fld id="{A2AEAC0E-F99C-47C9-A4ED-4F9191E5C1C0}" type="datetimeFigureOut">
               <a:rPr lang="en-US" smtClean="0"/>
-              <a:t>7/2/2025</a:t>
+              <a:t>6/26/26</a:t>
             </a:fld>
             <a:endParaRPr lang="en-US"/>
           </a:p>
@@ -875,7 +904,7 @@
           <a:p>
             <a:fld id="{A2AEAC0E-F99C-47C9-A4ED-4F9191E5C1C0}" type="datetimeFigureOut">
               <a:rPr lang="en-US" smtClean="0"/>
-              <a:t>7/2/2025</a:t>
+              <a:t>6/26/26</a:t>
             </a:fld>
             <a:endParaRPr lang="en-US"/>
           </a:p>
@@ -1150,7 +1179,7 @@
           <a:p>
             <a:fld id="{A2AEAC0E-F99C-47C9-A4ED-4F9191E5C1C0}" type="datetimeFigureOut">
               <a:rPr lang="en-US" smtClean="0"/>
-              <a:t>7/2/2025</a:t>
+              <a:t>6/26/26</a:t>
             </a:fld>
             <a:endParaRPr lang="en-US"/>
           </a:p>
@@ -1415,7 +1444,7 @@
           <a:p>
             <a:fld id="{A2AEAC0E-F99C-47C9-A4ED-4F9191E5C1C0}" type="datetimeFigureOut">
               <a:rPr lang="en-US" smtClean="0"/>
-              <a:t>7/2/2025</a:t>
+              <a:t>6/26/26</a:t>
             </a:fld>
             <a:endParaRPr lang="en-US"/>
           </a:p>
@@ -1827,7 +1856,7 @@
           <a:p>
             <a:fld id="{A2AEAC0E-F99C-47C9-A4ED-4F9191E5C1C0}" type="datetimeFigureOut">
               <a:rPr lang="en-US" smtClean="0"/>
-              <a:t>7/2/2025</a:t>
+              <a:t>6/26/26</a:t>
             </a:fld>
             <a:endParaRPr lang="en-US"/>
           </a:p>
@@ -1968,7 +1997,7 @@
           <a:p>
             <a:fld id="{A2AEAC0E-F99C-47C9-A4ED-4F9191E5C1C0}" type="datetimeFigureOut">
               <a:rPr lang="en-US" smtClean="0"/>
-              <a:t>7/2/2025</a:t>
+              <a:t>6/26/26</a:t>
             </a:fld>
             <a:endParaRPr lang="en-US"/>
           </a:p>
@@ -2081,7 +2110,7 @@
           <a:p>
             <a:fld id="{A2AEAC0E-F99C-47C9-A4ED-4F9191E5C1C0}" type="datetimeFigureOut">
               <a:rPr lang="en-US" smtClean="0"/>
-              <a:t>7/2/2025</a:t>
+              <a:t>6/26/26</a:t>
             </a:fld>
             <a:endParaRPr lang="en-US"/>
           </a:p>
@@ -2392,7 +2421,7 @@
           <a:p>
             <a:fld id="{A2AEAC0E-F99C-47C9-A4ED-4F9191E5C1C0}" type="datetimeFigureOut">
               <a:rPr lang="en-US" smtClean="0"/>
-              <a:t>7/2/2025</a:t>
+              <a:t>6/26/26</a:t>
             </a:fld>
             <a:endParaRPr lang="en-US"/>
           </a:p>
@@ -2680,7 +2709,7 @@
           <a:p>
             <a:fld id="{A2AEAC0E-F99C-47C9-A4ED-4F9191E5C1C0}" type="datetimeFigureOut">
               <a:rPr lang="en-US" smtClean="0"/>
-              <a:t>7/2/2025</a:t>
+              <a:t>6/26/26</a:t>
             </a:fld>
             <a:endParaRPr lang="en-US"/>
           </a:p>
@@ -2921,7 +2950,7 @@
           <a:p>
             <a:fld id="{A2AEAC0E-F99C-47C9-A4ED-4F9191E5C1C0}" type="datetimeFigureOut">
               <a:rPr lang="en-US" smtClean="0"/>
-              <a:t>7/2/2025</a:t>
+              <a:t>6/26/26</a:t>
             </a:fld>
             <a:endParaRPr lang="en-US"/>
           </a:p>
@@ -3481,21 +3510,39 @@
           <a:lstStyle/>
           <a:p>
             <a:r>
-              <a:rPr lang="en-US">
+              <a:rPr lang="en-US" dirty="0" err="1">
                 <a:latin typeface="Consolas" panose="020B0609020204030204" pitchFamily="49" charset="0"/>
               </a:rPr>
-              <a:t>kvantni bool</a:t>
+              <a:t>kvantni</a:t>
+            </a:r>
+            <a:r>
+              <a:rPr lang="en-US" dirty="0">
+                <a:latin typeface="Consolas" panose="020B0609020204030204" pitchFamily="49" charset="0"/>
+              </a:rPr>
+              <a:t> bool</a:t>
             </a:r>
             <a:br>
-              <a:rPr lang="en-US">
+              <a:rPr lang="en-US" dirty="0">
                 <a:latin typeface="Consolas" panose="020B0609020204030204" pitchFamily="49" charset="0"/>
               </a:rPr>
             </a:br>
             <a:r>
-              <a:rPr lang="en-US">
+              <a:rPr lang="en-US" dirty="0">
                 <a:latin typeface="Consolas" panose="020B0609020204030204" pitchFamily="49" charset="0"/>
               </a:rPr>
-              <a:t>(QuantumFloat)</a:t>
+              <a:t>(</a:t>
+            </a:r>
+            <a:r>
+              <a:rPr lang="en-US" dirty="0" err="1">
+                <a:latin typeface="Consolas" panose="020B0609020204030204" pitchFamily="49" charset="0"/>
+              </a:rPr>
+              <a:t>QuantumBool</a:t>
+            </a:r>
+            <a:r>
+              <a:rPr lang="en-US" dirty="0">
+                <a:latin typeface="Consolas" panose="020B0609020204030204" pitchFamily="49" charset="0"/>
+              </a:rPr>
+              <a:t>)</a:t>
             </a:r>
           </a:p>
         </p:txBody>
